--- a/slides/pptx/week12.pptx
+++ b/slides/pptx/week12.pptx
@@ -959,7 +959,8 @@
           <a:p>
             <a:r>
               <a:rPr lang="en-US" dirty="0"/>
-              <a:t>The synthesis slide — everything from the last five slides (SAST/SCA, SBOM, Cosign, the defenses checklist) is one column each in this diagram, chained in the order a real dependency actually travels. Walk it left to right ONE time, don't re-teach each hop — the point is showing they were never separate tools, they're six links in the same chain. Land on the closing line before moving to the game. ~5 min.</a:t>
+              <a:t>The synthesis slide — everything from the last five slides (SAST/SCA, SBOM, Cosign, the defenses checklist) is one column each in this diagram, chained in the order a real dependency actually travels. Walk it left to right ONE time, don't re-teach each hop — the point is showing they were never separate tools, they're six links in the same chain. Land on the closing line before moving to the game. ~5 min.
+Diagram: Six hops a dependency crosses from a public registry into production, each with its own attack and the control that answers it: registry (typosquatting → one trusted index), resolver (dependency confusion → scope the namespace), fetch (compromised maintainer → lockfile with hashes), build (stale pins → SCA in CI), image (no inventory → SBOM), deploy (unsigned image → Sigstore keyless gate). "We scanned our code" covers none of this — SAST reads the code you wrote, all six hops are code you didn't.</a:t>
             </a:r>
             <a:endParaRPr lang="en-US" dirty="0"/>
           </a:p>
@@ -2390,7 +2391,7 @@
       </p:grpSpPr>
       <p:pic>
         <p:nvPicPr>
-          <p:cNvPr id="2" name="Image 0" descr="/Users/pop7/Library/CloudStorage/OneDrive-MonsterConnectCo.,Ltd/Lecture/KOSEN69 - software-security/slides/pptx/assets/logo-small.png">    </p:cNvPr>
+          <p:cNvPr id="2" name="Image 0" descr="/private/tmp/claude-501/-Users-pop7-Library-CloudStorage-OneDrive-MonsterConnectCo--Ltd-Lecture-KOSEN69---software-security/e6d6556f-17de-403d-a9a0-cf2f846149b4/scratchpad/tree/slides/pptx/assets/logo-small.png">    </p:cNvPr>
           <p:cNvPicPr>
             <a:picLocks noChangeAspect="1"/>
           </p:cNvPicPr>
@@ -2950,7 +2951,7 @@
       </p:sp>
       <p:pic>
         <p:nvPicPr>
-          <p:cNvPr id="8" name="Image 1" descr="/Users/pop7/Library/CloudStorage/OneDrive-MonsterConnectCo.,Ltd/Lecture/KOSEN69 - software-security/slides/pptx/assets/logo-small.png">    </p:cNvPr>
+          <p:cNvPr id="8" name="Image 1" descr="/private/tmp/claude-501/-Users-pop7-Library-CloudStorage-OneDrive-MonsterConnectCo--Ltd-Lecture-KOSEN69---software-security/e6d6556f-17de-403d-a9a0-cf2f846149b4/scratchpad/tree/slides/pptx/assets/logo-small.png">    </p:cNvPr>
           <p:cNvPicPr>
             <a:picLocks noChangeAspect="1"/>
           </p:cNvPicPr>
@@ -3272,7 +3273,7 @@
       </p:sp>
       <p:pic>
         <p:nvPicPr>
-          <p:cNvPr id="8" name="Image 1" descr="/Users/pop7/Library/CloudStorage/OneDrive-MonsterConnectCo.,Ltd/Lecture/KOSEN69 - software-security/slides/pptx/assets/logo-small.png">    </p:cNvPr>
+          <p:cNvPr id="8" name="Image 1" descr="/private/tmp/claude-501/-Users-pop7-Library-CloudStorage-OneDrive-MonsterConnectCo--Ltd-Lecture-KOSEN69---software-security/e6d6556f-17de-403d-a9a0-cf2f846149b4/scratchpad/tree/slides/pptx/assets/logo-small.png">    </p:cNvPr>
           <p:cNvPicPr>
             <a:picLocks noChangeAspect="1"/>
           </p:cNvPicPr>
@@ -3594,7 +3595,7 @@
       </p:sp>
       <p:pic>
         <p:nvPicPr>
-          <p:cNvPr id="8" name="Image 1" descr="/Users/pop7/Library/CloudStorage/OneDrive-MonsterConnectCo.,Ltd/Lecture/KOSEN69 - software-security/slides/pptx/assets/logo-small.png">    </p:cNvPr>
+          <p:cNvPr id="8" name="Image 1" descr="/private/tmp/claude-501/-Users-pop7-Library-CloudStorage-OneDrive-MonsterConnectCo--Ltd-Lecture-KOSEN69---software-security/e6d6556f-17de-403d-a9a0-cf2f846149b4/scratchpad/tree/slides/pptx/assets/logo-small.png">    </p:cNvPr>
           <p:cNvPicPr>
             <a:picLocks noChangeAspect="1"/>
           </p:cNvPicPr>
@@ -3958,7 +3959,7 @@
       </p:sp>
       <p:pic>
         <p:nvPicPr>
-          <p:cNvPr id="8" name="Image 1" descr="/Users/pop7/Library/CloudStorage/OneDrive-MonsterConnectCo.,Ltd/Lecture/KOSEN69 - software-security/slides/pptx/assets/logo-small.png">    </p:cNvPr>
+          <p:cNvPr id="8" name="Image 1" descr="/private/tmp/claude-501/-Users-pop7-Library-CloudStorage-OneDrive-MonsterConnectCo--Ltd-Lecture-KOSEN69---software-security/e6d6556f-17de-403d-a9a0-cf2f846149b4/scratchpad/tree/slides/pptx/assets/logo-small.png">    </p:cNvPr>
           <p:cNvPicPr>
             <a:picLocks noChangeAspect="1"/>
           </p:cNvPicPr>
@@ -4102,16 +4103,40 @@
           </a:p>
         </p:txBody>
       </p:sp>
-      <p:sp>
-        <p:nvSpPr>
-          <p:cNvPr id="5" name="Text 2"/>
+      <p:pic>
+        <p:nvPicPr>
+          <p:cNvPr id="5" name="Image 1" descr="Six hops a dependency crosses from a public registry into production, each with its own attack and the control that answers it: registry (typosquatting → one trusted index), resolver (dependency confusion → scope the namespace), fetch (compromised maintainer → lockfile with hashes), build (stale pins → SCA in CI), image (no inventory → SBOM), deploy (unsigned image → Sigstore keyless gate). &quot;We scanned our code&quot; covers none of this — SAST reads the code you wrote, all six hops are code you didn't.">    </p:cNvPr>
+          <p:cNvPicPr>
+            <a:picLocks noChangeAspect="1"/>
+          </p:cNvPicPr>
+          <p:nvPr/>
+        </p:nvPicPr>
+        <p:blipFill>
+          <a:blip r:embed="rId2"/>
+          <a:stretch>
+            <a:fillRect/>
+          </a:stretch>
+        </p:blipFill>
+        <p:spPr>
+          <a:xfrm>
+            <a:off x="2778833" y="1097280"/>
+            <a:ext cx="3586333" cy="3566160"/>
+          </a:xfrm>
+          <a:prstGeom prst="rect">
+            <a:avLst/>
+          </a:prstGeom>
+        </p:spPr>
+      </p:pic>
+      <p:sp>
+        <p:nvSpPr>
+          <p:cNvPr id="6" name="Text 2"/>
           <p:cNvSpPr/>
           <p:nvPr/>
         </p:nvSpPr>
         <p:spPr>
           <a:xfrm>
-            <a:off x="548640" y="1325880"/>
-            <a:ext cx="8046720" cy="2194560"/>
+            <a:off x="457200" y="4800600"/>
+            <a:ext cx="6949440" cy="274320"/>
           </a:xfrm>
           <a:prstGeom prst="rect">
             <a:avLst/>
@@ -4120,62 +4145,21 @@
           <a:ln/>
         </p:spPr>
         <p:txBody>
-          <a:bodyPr wrap="square" lIns="0" tIns="0" rIns="0" bIns="0" rtlCol="0" anchor="t">
-            <a:normAutofit/>
-          </a:bodyPr>
+          <a:bodyPr wrap="square" lIns="0" tIns="0" rIns="0" bIns="0" rtlCol="0" anchor="ctr"/>
           <a:lstStyle/>
           <a:p>
             <a:pPr indent="0" marL="0">
               <a:buNone/>
             </a:pPr>
             <a:r>
-              <a:rPr lang="en-US" sz="1400" dirty="0">
-                <a:solidFill>
-                  <a:srgbClr val="1F2937"/>
+              <a:rPr lang="en-US" sz="900" dirty="0">
+                <a:solidFill>
+                  <a:srgbClr val="64748B"/>
                 </a:solidFill>
                 <a:latin typeface="Calibri" pitchFamily="34" charset="0"/>
                 <a:ea typeface="Calibri" pitchFamily="34" charset="-122"/>
                 <a:cs typeface="Calibri" pitchFamily="34" charset="-120"/>
               </a:rPr>
-              <a:t>See diagram: Six hops a dependency crosses from a public registry into production, each with its own attack and the control that answers it: registry (typosquatting → one trusted index), resolver (dependency confusion → scope the namespace), fetch (compromised maintainer → lockfile with hashes), build (stale pins → SCA in CI), image (no inventory → SBOM), deploy (unsigned image → Sigstore keyless gate). "We scanned our code" covers none of this — SAST reads the code you wrote, all six hops are code you didn't. (web only)</a:t>
-            </a:r>
-            <a:endParaRPr lang="en-US" sz="1400" dirty="0"/>
-          </a:p>
-        </p:txBody>
-      </p:sp>
-      <p:sp>
-        <p:nvSpPr>
-          <p:cNvPr id="6" name="Text 3"/>
-          <p:cNvSpPr/>
-          <p:nvPr/>
-        </p:nvSpPr>
-        <p:spPr>
-          <a:xfrm>
-            <a:off x="457200" y="4800600"/>
-            <a:ext cx="6949440" cy="274320"/>
-          </a:xfrm>
-          <a:prstGeom prst="rect">
-            <a:avLst/>
-          </a:prstGeom>
-          <a:noFill/>
-          <a:ln/>
-        </p:spPr>
-        <p:txBody>
-          <a:bodyPr wrap="square" lIns="0" tIns="0" rIns="0" bIns="0" rtlCol="0" anchor="ctr"/>
-          <a:lstStyle/>
-          <a:p>
-            <a:pPr indent="0" marL="0">
-              <a:buNone/>
-            </a:pPr>
-            <a:r>
-              <a:rPr lang="en-US" sz="900" dirty="0">
-                <a:solidFill>
-                  <a:srgbClr val="64748B"/>
-                </a:solidFill>
-                <a:latin typeface="Calibri" pitchFamily="34" charset="0"/>
-                <a:ea typeface="Calibri" pitchFamily="34" charset="-122"/>
-                <a:cs typeface="Calibri" pitchFamily="34" charset="-120"/>
-              </a:rPr>
               <a:t>Software Security · Week 12</a:t>
             </a:r>
             <a:endParaRPr lang="en-US" sz="900" dirty="0"/>
@@ -4184,14 +4168,14 @@
       </p:sp>
       <p:pic>
         <p:nvPicPr>
-          <p:cNvPr id="7" name="Image 1" descr="/Users/pop7/Library/CloudStorage/OneDrive-MonsterConnectCo.,Ltd/Lecture/KOSEN69 - software-security/slides/pptx/assets/logo-small.png">    </p:cNvPr>
+          <p:cNvPr id="7" name="Image 2" descr="/private/tmp/claude-501/-Users-pop7-Library-CloudStorage-OneDrive-MonsterConnectCo--Ltd-Lecture-KOSEN69---software-security/e6d6556f-17de-403d-a9a0-cf2f846149b4/scratchpad/tree/slides/pptx/assets/logo-small.png">    </p:cNvPr>
           <p:cNvPicPr>
             <a:picLocks noChangeAspect="1"/>
           </p:cNvPicPr>
           <p:nvPr/>
         </p:nvPicPr>
         <p:blipFill>
-          <a:blip r:embed="rId2"/>
+          <a:blip r:embed="rId3"/>
           <a:stretch>
             <a:fillRect/>
           </a:stretch>
@@ -4569,7 +4553,7 @@
       </p:sp>
       <p:pic>
         <p:nvPicPr>
-          <p:cNvPr id="12" name="Image 1" descr="/Users/pop7/Library/CloudStorage/OneDrive-MonsterConnectCo.,Ltd/Lecture/KOSEN69 - software-security/slides/pptx/assets/logo-small.png">    </p:cNvPr>
+          <p:cNvPr id="12" name="Image 1" descr="/private/tmp/claude-501/-Users-pop7-Library-CloudStorage-OneDrive-MonsterConnectCo--Ltd-Lecture-KOSEN69---software-security/e6d6556f-17de-403d-a9a0-cf2f846149b4/scratchpad/tree/slides/pptx/assets/logo-small.png">    </p:cNvPr>
           <p:cNvPicPr>
             <a:picLocks noChangeAspect="1"/>
           </p:cNvPicPr>
@@ -4954,7 +4938,7 @@
       </p:sp>
       <p:pic>
         <p:nvPicPr>
-          <p:cNvPr id="10" name="Image 1" descr="/Users/pop7/Library/CloudStorage/OneDrive-MonsterConnectCo.,Ltd/Lecture/KOSEN69 - software-security/slides/pptx/assets/logo-small.png">    </p:cNvPr>
+          <p:cNvPr id="10" name="Image 1" descr="/private/tmp/claude-501/-Users-pop7-Library-CloudStorage-OneDrive-MonsterConnectCo--Ltd-Lecture-KOSEN69---software-security/e6d6556f-17de-403d-a9a0-cf2f846149b4/scratchpad/tree/slides/pptx/assets/logo-small.png">    </p:cNvPr>
           <p:cNvPicPr>
             <a:picLocks noChangeAspect="1"/>
           </p:cNvPicPr>
@@ -5255,7 +5239,7 @@
       </p:sp>
       <p:pic>
         <p:nvPicPr>
-          <p:cNvPr id="8" name="Image 1" descr="/Users/pop7/Library/CloudStorage/OneDrive-MonsterConnectCo.,Ltd/Lecture/KOSEN69 - software-security/slides/pptx/assets/logo-small.png">    </p:cNvPr>
+          <p:cNvPr id="8" name="Image 1" descr="/private/tmp/claude-501/-Users-pop7-Library-CloudStorage-OneDrive-MonsterConnectCo--Ltd-Lecture-KOSEN69---software-security/e6d6556f-17de-403d-a9a0-cf2f846149b4/scratchpad/tree/slides/pptx/assets/logo-small.png">    </p:cNvPr>
           <p:cNvPicPr>
             <a:picLocks noChangeAspect="1"/>
           </p:cNvPicPr>
@@ -5389,7 +5373,7 @@
       </p:sp>
       <p:pic>
         <p:nvPicPr>
-          <p:cNvPr id="4" name="Image 0" descr="/Users/pop7/Library/CloudStorage/OneDrive-MonsterConnectCo.,Ltd/Lecture/KOSEN69 - software-security/slides/pptx/assets/logo-small.png">    </p:cNvPr>
+          <p:cNvPr id="4" name="Image 0" descr="/private/tmp/claude-501/-Users-pop7-Library-CloudStorage-OneDrive-MonsterConnectCo--Ltd-Lecture-KOSEN69---software-security/e6d6556f-17de-403d-a9a0-cf2f846149b4/scratchpad/tree/slides/pptx/assets/logo-small.png">    </p:cNvPr>
           <p:cNvPicPr>
             <a:picLocks noChangeAspect="1"/>
           </p:cNvPicPr>
@@ -5732,7 +5716,7 @@
       </p:sp>
       <p:pic>
         <p:nvPicPr>
-          <p:cNvPr id="8" name="Image 1" descr="/Users/pop7/Library/CloudStorage/OneDrive-MonsterConnectCo.,Ltd/Lecture/KOSEN69 - software-security/slides/pptx/assets/logo-small.png">    </p:cNvPr>
+          <p:cNvPr id="8" name="Image 1" descr="/private/tmp/claude-501/-Users-pop7-Library-CloudStorage-OneDrive-MonsterConnectCo--Ltd-Lecture-KOSEN69---software-security/e6d6556f-17de-403d-a9a0-cf2f846149b4/scratchpad/tree/slides/pptx/assets/logo-small.png">    </p:cNvPr>
           <p:cNvPicPr>
             <a:picLocks noChangeAspect="1"/>
           </p:cNvPicPr>
@@ -6033,7 +6017,7 @@
       </p:sp>
       <p:pic>
         <p:nvPicPr>
-          <p:cNvPr id="8" name="Image 1" descr="/Users/pop7/Library/CloudStorage/OneDrive-MonsterConnectCo.,Ltd/Lecture/KOSEN69 - software-security/slides/pptx/assets/logo-small.png">    </p:cNvPr>
+          <p:cNvPr id="8" name="Image 1" descr="/private/tmp/claude-501/-Users-pop7-Library-CloudStorage-OneDrive-MonsterConnectCo--Ltd-Lecture-KOSEN69---software-security/e6d6556f-17de-403d-a9a0-cf2f846149b4/scratchpad/tree/slides/pptx/assets/logo-small.png">    </p:cNvPr>
           <p:cNvPicPr>
             <a:picLocks noChangeAspect="1"/>
           </p:cNvPicPr>
@@ -6992,7 +6976,7 @@
       </p:sp>
       <p:pic>
         <p:nvPicPr>
-          <p:cNvPr id="7" name="Image 1" descr="/Users/pop7/Library/CloudStorage/OneDrive-MonsterConnectCo.,Ltd/Lecture/KOSEN69 - software-security/slides/pptx/assets/logo-small.png">    </p:cNvPr>
+          <p:cNvPr id="7" name="Image 1" descr="/private/tmp/claude-501/-Users-pop7-Library-CloudStorage-OneDrive-MonsterConnectCo--Ltd-Lecture-KOSEN69---software-security/e6d6556f-17de-403d-a9a0-cf2f846149b4/scratchpad/tree/slides/pptx/assets/logo-small.png">    </p:cNvPr>
           <p:cNvPicPr>
             <a:picLocks noChangeAspect="1"/>
           </p:cNvPicPr>
@@ -7240,7 +7224,7 @@
       </p:sp>
       <p:pic>
         <p:nvPicPr>
-          <p:cNvPr id="8" name="Image 1" descr="/Users/pop7/Library/CloudStorage/OneDrive-MonsterConnectCo.,Ltd/Lecture/KOSEN69 - software-security/slides/pptx/assets/logo-small.png">    </p:cNvPr>
+          <p:cNvPr id="8" name="Image 1" descr="/private/tmp/claude-501/-Users-pop7-Library-CloudStorage-OneDrive-MonsterConnectCo--Ltd-Lecture-KOSEN69---software-security/e6d6556f-17de-403d-a9a0-cf2f846149b4/scratchpad/tree/slides/pptx/assets/logo-small.png">    </p:cNvPr>
           <p:cNvPicPr>
             <a:picLocks noChangeAspect="1"/>
           </p:cNvPicPr>
@@ -7562,7 +7546,7 @@
       </p:sp>
       <p:pic>
         <p:nvPicPr>
-          <p:cNvPr id="8" name="Image 1" descr="/Users/pop7/Library/CloudStorage/OneDrive-MonsterConnectCo.,Ltd/Lecture/KOSEN69 - software-security/slides/pptx/assets/logo-small.png">    </p:cNvPr>
+          <p:cNvPr id="8" name="Image 1" descr="/private/tmp/claude-501/-Users-pop7-Library-CloudStorage-OneDrive-MonsterConnectCo--Ltd-Lecture-KOSEN69---software-security/e6d6556f-17de-403d-a9a0-cf2f846149b4/scratchpad/tree/slides/pptx/assets/logo-small.png">    </p:cNvPr>
           <p:cNvPicPr>
             <a:picLocks noChangeAspect="1"/>
           </p:cNvPicPr>
@@ -7805,7 +7789,7 @@
       </p:sp>
       <p:pic>
         <p:nvPicPr>
-          <p:cNvPr id="7" name="Image 1" descr="/Users/pop7/Library/CloudStorage/OneDrive-MonsterConnectCo.,Ltd/Lecture/KOSEN69 - software-security/slides/pptx/assets/logo-small.png">    </p:cNvPr>
+          <p:cNvPr id="7" name="Image 1" descr="/private/tmp/claude-501/-Users-pop7-Library-CloudStorage-OneDrive-MonsterConnectCo--Ltd-Lecture-KOSEN69---software-security/e6d6556f-17de-403d-a9a0-cf2f846149b4/scratchpad/tree/slides/pptx/assets/logo-small.png">    </p:cNvPr>
           <p:cNvPicPr>
             <a:picLocks noChangeAspect="1"/>
           </p:cNvPicPr>
@@ -8170,7 +8154,7 @@
       </p:sp>
       <p:pic>
         <p:nvPicPr>
-          <p:cNvPr id="10" name="Image 1" descr="/Users/pop7/Library/CloudStorage/OneDrive-MonsterConnectCo.,Ltd/Lecture/KOSEN69 - software-security/slides/pptx/assets/logo-small.png">    </p:cNvPr>
+          <p:cNvPr id="10" name="Image 1" descr="/private/tmp/claude-501/-Users-pop7-Library-CloudStorage-OneDrive-MonsterConnectCo--Ltd-Lecture-KOSEN69---software-security/e6d6556f-17de-403d-a9a0-cf2f846149b4/scratchpad/tree/slides/pptx/assets/logo-small.png">    </p:cNvPr>
           <p:cNvPicPr>
             <a:picLocks noChangeAspect="1"/>
           </p:cNvPicPr>
@@ -8471,7 +8455,7 @@
       </p:sp>
       <p:pic>
         <p:nvPicPr>
-          <p:cNvPr id="8" name="Image 1" descr="/Users/pop7/Library/CloudStorage/OneDrive-MonsterConnectCo.,Ltd/Lecture/KOSEN69 - software-security/slides/pptx/assets/logo-small.png">    </p:cNvPr>
+          <p:cNvPr id="8" name="Image 1" descr="/private/tmp/claude-501/-Users-pop7-Library-CloudStorage-OneDrive-MonsterConnectCo--Ltd-Lecture-KOSEN69---software-security/e6d6556f-17de-403d-a9a0-cf2f846149b4/scratchpad/tree/slides/pptx/assets/logo-small.png">    </p:cNvPr>
           <p:cNvPicPr>
             <a:picLocks noChangeAspect="1"/>
           </p:cNvPicPr>
